--- a/catalog/relations/templates/rel_sequence_4_8_rl.pptx
+++ b/catalog/relations/templates/rel_sequence_4_8_rl.pptx
@@ -4172,7 +4172,7 @@
         <p:spPr>
           <a:xfrm>
             <a:off x="731520" y="2971800"/>
-            <a:ext cx="10698480" cy="283464"/>
+            <a:ext cx="10698480" cy="237744"/>
           </a:xfrm>
           <a:prstGeom prst="rect">
             <a:avLst/>
@@ -4337,8 +4337,8 @@
         </p:nvSpPr>
         <p:spPr>
           <a:xfrm>
-            <a:off x="731520" y="3335274"/>
-            <a:ext cx="10698480" cy="283464"/>
+            <a:off x="731520" y="3328416"/>
+            <a:ext cx="10698480" cy="237744"/>
           </a:xfrm>
           <a:prstGeom prst="rect">
             <a:avLst/>
@@ -4394,7 +4394,7 @@
         </p:nvCxnSpPr>
         <p:spPr>
           <a:xfrm>
-            <a:off x="914400" y="3646170"/>
+            <a:off x="914400" y="3639312"/>
             <a:ext cx="10058400" cy="0"/>
           </a:xfrm>
           <a:prstGeom prst="line">
@@ -4430,7 +4430,7 @@
         </p:nvCxnSpPr>
         <p:spPr>
           <a:xfrm>
-            <a:off x="914400" y="3646170"/>
+            <a:off x="914400" y="3639312"/>
             <a:ext cx="10058400" cy="0"/>
           </a:xfrm>
           <a:prstGeom prst="line">
@@ -4466,7 +4466,7 @@
         </p:nvCxnSpPr>
         <p:spPr>
           <a:xfrm>
-            <a:off x="914400" y="3646170"/>
+            <a:off x="914400" y="3639312"/>
             <a:ext cx="10058400" cy="0"/>
           </a:xfrm>
           <a:prstGeom prst="line">
@@ -4503,8 +4503,8 @@
         </p:nvSpPr>
         <p:spPr>
           <a:xfrm>
-            <a:off x="731520" y="3698748"/>
-            <a:ext cx="10698480" cy="283464"/>
+            <a:off x="731520" y="3685032"/>
+            <a:ext cx="10698480" cy="237744"/>
           </a:xfrm>
           <a:prstGeom prst="rect">
             <a:avLst/>
@@ -4560,7 +4560,7 @@
         </p:nvCxnSpPr>
         <p:spPr>
           <a:xfrm>
-            <a:off x="914400" y="4009644"/>
+            <a:off x="914400" y="3995928"/>
             <a:ext cx="10058400" cy="0"/>
           </a:xfrm>
           <a:prstGeom prst="line">
@@ -4596,7 +4596,7 @@
         </p:nvCxnSpPr>
         <p:spPr>
           <a:xfrm>
-            <a:off x="914400" y="4009644"/>
+            <a:off x="914400" y="3995928"/>
             <a:ext cx="10058400" cy="0"/>
           </a:xfrm>
           <a:prstGeom prst="line">
@@ -4632,7 +4632,7 @@
         </p:nvCxnSpPr>
         <p:spPr>
           <a:xfrm>
-            <a:off x="914400" y="4009644"/>
+            <a:off x="914400" y="3995928"/>
             <a:ext cx="10058400" cy="0"/>
           </a:xfrm>
           <a:prstGeom prst="line">
@@ -4669,8 +4669,8 @@
         </p:nvSpPr>
         <p:spPr>
           <a:xfrm>
-            <a:off x="731520" y="4062222"/>
-            <a:ext cx="10698480" cy="283464"/>
+            <a:off x="731520" y="4041648"/>
+            <a:ext cx="10698480" cy="237744"/>
           </a:xfrm>
           <a:prstGeom prst="rect">
             <a:avLst/>
@@ -4726,7 +4726,7 @@
         </p:nvCxnSpPr>
         <p:spPr>
           <a:xfrm>
-            <a:off x="914400" y="4373118"/>
+            <a:off x="914400" y="4352544"/>
             <a:ext cx="10058400" cy="0"/>
           </a:xfrm>
           <a:prstGeom prst="line">
@@ -4762,7 +4762,7 @@
         </p:nvCxnSpPr>
         <p:spPr>
           <a:xfrm>
-            <a:off x="914400" y="4373118"/>
+            <a:off x="914400" y="4352544"/>
             <a:ext cx="10058400" cy="0"/>
           </a:xfrm>
           <a:prstGeom prst="line">
@@ -4798,7 +4798,7 @@
         </p:nvCxnSpPr>
         <p:spPr>
           <a:xfrm>
-            <a:off x="914400" y="4373118"/>
+            <a:off x="914400" y="4352544"/>
             <a:ext cx="10058400" cy="0"/>
           </a:xfrm>
           <a:prstGeom prst="line">
@@ -4835,8 +4835,8 @@
         </p:nvSpPr>
         <p:spPr>
           <a:xfrm>
-            <a:off x="731520" y="4425696"/>
-            <a:ext cx="10698480" cy="283464"/>
+            <a:off x="731520" y="4398264"/>
+            <a:ext cx="10698480" cy="237744"/>
           </a:xfrm>
           <a:prstGeom prst="rect">
             <a:avLst/>
@@ -4892,7 +4892,7 @@
         </p:nvCxnSpPr>
         <p:spPr>
           <a:xfrm>
-            <a:off x="914400" y="4736592"/>
+            <a:off x="914400" y="4709160"/>
             <a:ext cx="10058400" cy="0"/>
           </a:xfrm>
           <a:prstGeom prst="line">
@@ -4928,7 +4928,7 @@
         </p:nvCxnSpPr>
         <p:spPr>
           <a:xfrm>
-            <a:off x="914400" y="4736592"/>
+            <a:off x="914400" y="4709160"/>
             <a:ext cx="10058400" cy="0"/>
           </a:xfrm>
           <a:prstGeom prst="line">
@@ -4964,7 +4964,7 @@
         </p:nvCxnSpPr>
         <p:spPr>
           <a:xfrm>
-            <a:off x="914400" y="4736592"/>
+            <a:off x="914400" y="4709160"/>
             <a:ext cx="10058400" cy="0"/>
           </a:xfrm>
           <a:prstGeom prst="line">
@@ -5001,8 +5001,8 @@
         </p:nvSpPr>
         <p:spPr>
           <a:xfrm>
-            <a:off x="731520" y="4789170"/>
-            <a:ext cx="10698480" cy="283464"/>
+            <a:off x="731520" y="4754880"/>
+            <a:ext cx="10698480" cy="237744"/>
           </a:xfrm>
           <a:prstGeom prst="rect">
             <a:avLst/>
@@ -5058,7 +5058,7 @@
         </p:nvCxnSpPr>
         <p:spPr>
           <a:xfrm>
-            <a:off x="914400" y="5100066"/>
+            <a:off x="914400" y="5065776"/>
             <a:ext cx="10058400" cy="0"/>
           </a:xfrm>
           <a:prstGeom prst="line">
@@ -5094,7 +5094,7 @@
         </p:nvCxnSpPr>
         <p:spPr>
           <a:xfrm>
-            <a:off x="914400" y="5100066"/>
+            <a:off x="914400" y="5065776"/>
             <a:ext cx="10058400" cy="0"/>
           </a:xfrm>
           <a:prstGeom prst="line">
@@ -5130,7 +5130,7 @@
         </p:nvCxnSpPr>
         <p:spPr>
           <a:xfrm>
-            <a:off x="914400" y="5100066"/>
+            <a:off x="914400" y="5065776"/>
             <a:ext cx="10058400" cy="0"/>
           </a:xfrm>
           <a:prstGeom prst="line">
@@ -5167,8 +5167,8 @@
         </p:nvSpPr>
         <p:spPr>
           <a:xfrm>
-            <a:off x="731520" y="5152644"/>
-            <a:ext cx="10698480" cy="283464"/>
+            <a:off x="731520" y="5111496"/>
+            <a:ext cx="10698480" cy="237744"/>
           </a:xfrm>
           <a:prstGeom prst="rect">
             <a:avLst/>
@@ -5224,7 +5224,7 @@
         </p:nvCxnSpPr>
         <p:spPr>
           <a:xfrm>
-            <a:off x="914400" y="5463540"/>
+            <a:off x="914400" y="5422392"/>
             <a:ext cx="10058400" cy="0"/>
           </a:xfrm>
           <a:prstGeom prst="line">
@@ -5260,7 +5260,7 @@
         </p:nvCxnSpPr>
         <p:spPr>
           <a:xfrm>
-            <a:off x="914400" y="5463540"/>
+            <a:off x="914400" y="5422392"/>
             <a:ext cx="10058400" cy="0"/>
           </a:xfrm>
           <a:prstGeom prst="line">
@@ -5296,7 +5296,7 @@
         </p:nvCxnSpPr>
         <p:spPr>
           <a:xfrm>
-            <a:off x="914400" y="5463540"/>
+            <a:off x="914400" y="5422392"/>
             <a:ext cx="10058400" cy="0"/>
           </a:xfrm>
           <a:prstGeom prst="line">
@@ -5333,8 +5333,8 @@
         </p:nvSpPr>
         <p:spPr>
           <a:xfrm>
-            <a:off x="731520" y="5516118"/>
-            <a:ext cx="10698480" cy="283464"/>
+            <a:off x="731520" y="5468112"/>
+            <a:ext cx="10698480" cy="237744"/>
           </a:xfrm>
           <a:prstGeom prst="rect">
             <a:avLst/>
@@ -5390,7 +5390,7 @@
         </p:nvCxnSpPr>
         <p:spPr>
           <a:xfrm>
-            <a:off x="914400" y="5827014"/>
+            <a:off x="914400" y="5779008"/>
             <a:ext cx="10058400" cy="0"/>
           </a:xfrm>
           <a:prstGeom prst="line">
@@ -5426,7 +5426,7 @@
         </p:nvCxnSpPr>
         <p:spPr>
           <a:xfrm>
-            <a:off x="914400" y="5827014"/>
+            <a:off x="914400" y="5779008"/>
             <a:ext cx="10058400" cy="0"/>
           </a:xfrm>
           <a:prstGeom prst="line">
@@ -5462,7 +5462,7 @@
         </p:nvCxnSpPr>
         <p:spPr>
           <a:xfrm>
-            <a:off x="914400" y="5827014"/>
+            <a:off x="914400" y="5779008"/>
             <a:ext cx="10058400" cy="0"/>
           </a:xfrm>
           <a:prstGeom prst="line">
